--- a/assets/documents/maintenance-guide.pptx
+++ b/assets/documents/maintenance-guide.pptx
@@ -3934,7 +3934,7 @@
                 <a:ea typeface="Calibri" pitchFamily="34" charset="-122"/>
                 <a:cs typeface="Calibri" pitchFamily="34" charset="-120"/>
               </a:rPr>
-              <a:t> If the thread insert itself is damaged, the yo-yo halves need replacing.</a:t>
+              <a:t> Glue the axle into the stripped half, or have the threads re-tapped.</a:t>
             </a:r>
             <a:endParaRPr lang="en-US" sz="1300" dirty="0"/>
           </a:p>
@@ -6606,7 +6606,7 @@
                 <a:ea typeface="Calibri" pitchFamily="34" charset="-122"/>
                 <a:cs typeface="Calibri" pitchFamily="34" charset="-120"/>
               </a:rPr>
-              <a:t>Try a longer axle. If that fails, the yo-yo halves need replacing.</a:t>
+              <a:t>Try a longer axle. Still loose? Glue the axle into the stripped half.</a:t>
             </a:r>
             <a:endParaRPr lang="en-US" sz="1100" dirty="0"/>
           </a:p>
